--- a/system-design-101/vi/lessons/sd-04-047/slides/sd-04-047.pptx
+++ b/system-design-101/vi/lessons/sd-04-047/slides/sd-04-047.pptx
@@ -2050,7 +2050,7 @@
               <a:t>Nhanh</a:t>
             </a:r>
             <a:r>
-              <a:rPr lang="en-US" sz="2250" dirty="0" spc="1" kern="0">
+              <a:rPr lang="en-US" sz="2250" dirty="0" spc="2" kern="0">
                 <a:solidFill>
                   <a:srgbClr val="9AA0B5"/>
                 </a:solidFill>
@@ -2058,7 +2058,62 @@
                 <a:ea typeface="Be Vietnam Pro" pitchFamily="34" charset="-122"/>
                 <a:cs typeface="Be Vietnam Pro" pitchFamily="34" charset="-120"/>
               </a:rPr>
-              <a:t> hơn</a:t>
+              <a:t> hơn:</a:t>
+            </a:r>
+            <a:r>
+              <a:rPr lang="en-US" sz="2250" dirty="0" spc="4" kern="0">
+                <a:solidFill>
+                  <a:srgbClr val="9AA0B5"/>
+                </a:solidFill>
+                <a:latin typeface="Be Vietnam Pro" pitchFamily="34" charset="0"/>
+                <a:ea typeface="Be Vietnam Pro" pitchFamily="34" charset="-122"/>
+                <a:cs typeface="Be Vietnam Pro" pitchFamily="34" charset="-120"/>
+              </a:rPr>
+              <a:t> dữ</a:t>
+            </a:r>
+            <a:r>
+              <a:rPr lang="en-US" sz="2250" dirty="0" spc="-2" kern="0">
+                <a:solidFill>
+                  <a:srgbClr val="9AA0B5"/>
+                </a:solidFill>
+                <a:latin typeface="Be Vietnam Pro" pitchFamily="34" charset="0"/>
+                <a:ea typeface="Be Vietnam Pro" pitchFamily="34" charset="-122"/>
+                <a:cs typeface="Be Vietnam Pro" pitchFamily="34" charset="-120"/>
+              </a:rPr>
+              <a:t> liệu</a:t>
+            </a:r>
+            <a:r>
+              <a:rPr lang="en-US" sz="2250" dirty="0" spc="5" kern="0">
+                <a:solidFill>
+                  <a:srgbClr val="9AA0B5"/>
+                </a:solidFill>
+                <a:latin typeface="Be Vietnam Pro" pitchFamily="34" charset="0"/>
+                <a:ea typeface="Be Vietnam Pro" pitchFamily="34" charset="-122"/>
+                <a:cs typeface="Be Vietnam Pro" pitchFamily="34" charset="-120"/>
+              </a:rPr>
+              <a:t> cũ</a:t>
+            </a:r>
+            <a:r>
+              <a:rPr lang="en-US" sz="2250" dirty="0" spc="-1" kern="0">
+                <a:solidFill>
+                  <a:srgbClr val="9AA0B5"/>
+                </a:solidFill>
+                <a:latin typeface="Be Vietnam Pro" pitchFamily="34" charset="0"/>
+                <a:ea typeface="Be Vietnam Pro" pitchFamily="34" charset="-122"/>
+                <a:cs typeface="Be Vietnam Pro" pitchFamily="34" charset="-120"/>
+              </a:rPr>
+              <a:t> hơn,</a:t>
+            </a:r>
+            <a:r>
+              <a:rPr lang="en-US" sz="2250" dirty="0" spc="-3" kern="0">
+                <a:solidFill>
+                  <a:srgbClr val="9AA0B5"/>
+                </a:solidFill>
+                <a:latin typeface="Be Vietnam Pro" pitchFamily="34" charset="0"/>
+                <a:ea typeface="Be Vietnam Pro" pitchFamily="34" charset="-122"/>
+                <a:cs typeface="Be Vietnam Pro" pitchFamily="34" charset="-120"/>
+              </a:rPr>
+              <a:t> hoặc</a:t>
             </a:r>
             <a:r>
               <a:rPr lang="en-US" sz="2250" dirty="0" spc="0" kern="0">
@@ -2069,10 +2124,10 @@
                 <a:ea typeface="Be Vietnam Pro" pitchFamily="34" charset="-122"/>
                 <a:cs typeface="Be Vietnam Pro" pitchFamily="34" charset="-120"/>
               </a:rPr>
-              <a:t> thì</a:t>
-            </a:r>
-            <a:r>
-              <a:rPr lang="en-US" sz="2250" dirty="0" spc="-24" kern="0">
+              <a:t> thêm</a:t>
+            </a:r>
+            <a:r>
+              <a:rPr lang="en-US" sz="2250" dirty="0" spc="-12" kern="0">
                 <a:solidFill>
                   <a:srgbClr val="9AA0B5"/>
                 </a:solidFill>
@@ -2080,10 +2135,10 @@
                 <a:ea typeface="Be Vietnam Pro" pitchFamily="34" charset="-122"/>
                 <a:cs typeface="Be Vietnam Pro" pitchFamily="34" charset="-120"/>
               </a:rPr>
-              <a:t> trả</a:t>
-            </a:r>
-            <a:r>
-              <a:rPr lang="en-US" sz="2250" dirty="0" spc="-2" kern="0">
+              <a:t> vận</a:t>
+            </a:r>
+            <a:r>
+              <a:rPr lang="en-US" sz="2250" dirty="0" spc="0" kern="0">
                 <a:solidFill>
                   <a:srgbClr val="9AA0B5"/>
                 </a:solidFill>
@@ -2091,51 +2146,7 @@
                 <a:ea typeface="Be Vietnam Pro" pitchFamily="34" charset="-122"/>
                 <a:cs typeface="Be Vietnam Pro" pitchFamily="34" charset="-120"/>
               </a:rPr>
-              <a:t> bằng</a:t>
-            </a:r>
-            <a:r>
-              <a:rPr lang="en-US" sz="2250" dirty="0" spc="5" kern="0">
-                <a:solidFill>
-                  <a:srgbClr val="9AA0B5"/>
-                </a:solidFill>
-                <a:latin typeface="Be Vietnam Pro" pitchFamily="34" charset="0"/>
-                <a:ea typeface="Be Vietnam Pro" pitchFamily="34" charset="-122"/>
-                <a:cs typeface="Be Vietnam Pro" pitchFamily="34" charset="-120"/>
-              </a:rPr>
-              <a:t> dữ</a:t>
-            </a:r>
-            <a:r>
-              <a:rPr lang="en-US" sz="2250" dirty="0" spc="-2" kern="0">
-                <a:solidFill>
-                  <a:srgbClr val="9AA0B5"/>
-                </a:solidFill>
-                <a:latin typeface="Be Vietnam Pro" pitchFamily="34" charset="0"/>
-                <a:ea typeface="Be Vietnam Pro" pitchFamily="34" charset="-122"/>
-                <a:cs typeface="Be Vietnam Pro" pitchFamily="34" charset="-120"/>
-              </a:rPr>
-              <a:t> liệu</a:t>
-            </a:r>
-            <a:r>
-              <a:rPr lang="en-US" sz="2250" dirty="0" spc="5" kern="0">
-                <a:solidFill>
-                  <a:srgbClr val="9AA0B5"/>
-                </a:solidFill>
-                <a:latin typeface="Be Vietnam Pro" pitchFamily="34" charset="0"/>
-                <a:ea typeface="Be Vietnam Pro" pitchFamily="34" charset="-122"/>
-                <a:cs typeface="Be Vietnam Pro" pitchFamily="34" charset="-120"/>
-              </a:rPr>
-              <a:t> cũ</a:t>
-            </a:r>
-            <a:r>
-              <a:rPr lang="en-US" sz="2250" dirty="0" spc="0" kern="0">
-                <a:solidFill>
-                  <a:srgbClr val="9AA0B5"/>
-                </a:solidFill>
-                <a:latin typeface="Be Vietnam Pro" pitchFamily="34" charset="0"/>
-                <a:ea typeface="Be Vietnam Pro" pitchFamily="34" charset="-122"/>
-                <a:cs typeface="Be Vietnam Pro" pitchFamily="34" charset="-120"/>
-              </a:rPr>
-              <a:t> hơn</a:t>
+              <a:t> hành</a:t>
             </a:r>
             <a:endParaRPr lang="en-US" sz="2250" dirty="0"/>
           </a:p>

--- a/system-design-101/vi/lessons/sd-04-047/slides/sd-04-047.pptx
+++ b/system-design-101/vi/lessons/sd-04-047/slides/sd-04-047.pptx
@@ -7339,32 +7339,10 @@
                 <a:ea typeface="Be Vietnam Pro" pitchFamily="34" charset="-122"/>
                 <a:cs typeface="Be Vietnam Pro" pitchFamily="34" charset="-120"/>
               </a:rPr>
-              <a:t> THÊM SỨC</a:t>
-            </a:r>
-            <a:r>
-              <a:rPr lang="en-US" sz="1950" b="1" spc="196" kern="0" dirty="0">
-                <a:solidFill>
-                  <a:srgbClr val="7C93FF"/>
-                </a:solidFill>
-                <a:latin typeface="Be Vietnam Pro" pitchFamily="34" charset="0"/>
-                <a:ea typeface="Be Vietnam Pro" pitchFamily="34" charset="-122"/>
-                <a:cs typeface="Be Vietnam Pro" pitchFamily="34" charset="-120"/>
-              </a:rPr>
-              <a:t> HOẶC</a:t>
-            </a:r>
-            <a:r>
-              <a:rPr lang="en-US" sz="1950" b="1" spc="223" kern="0" dirty="0">
-                <a:solidFill>
-                  <a:srgbClr val="7C93FF"/>
-                </a:solidFill>
-                <a:latin typeface="Be Vietnam Pro" pitchFamily="34" charset="0"/>
-                <a:ea typeface="Be Vietnam Pro" pitchFamily="34" charset="-122"/>
-                <a:cs typeface="Be Vietnam Pro" pitchFamily="34" charset="-120"/>
-              </a:rPr>
-              <a:t> THÊM</a:t>
-            </a:r>
-            <a:r>
-              <a:rPr lang="en-US" sz="1950" b="1" spc="176" kern="0" dirty="0">
+              <a:t> THÊM SỨC, THÊM</a:t>
+            </a:r>
+            <a:r>
+              <a:rPr lang="en-US" sz="1950" b="1" spc="175" kern="0" dirty="0">
                 <a:solidFill>
                   <a:srgbClr val="7C93FF"/>
                 </a:solidFill>
@@ -8852,7 +8830,7 @@
               <a:t> MATERIALIZED</a:t>
             </a:r>
             <a:r>
-              <a:rPr lang="en-US" sz="1950" b="1" spc="227" kern="0" dirty="0">
+              <a:rPr lang="en-US" sz="1950" b="1" spc="226" kern="0" dirty="0">
                 <a:solidFill>
                   <a:srgbClr val="B45309"/>
                 </a:solidFill>
@@ -8860,21 +8838,10 @@
                 <a:ea typeface="Be Vietnam Pro" pitchFamily="34" charset="-122"/>
                 <a:cs typeface="Be Vietnam Pro" pitchFamily="34" charset="-120"/>
               </a:rPr>
-              <a:t> VIEW</a:t>
-            </a:r>
-            <a:r>
-              <a:rPr lang="en-US" sz="1950" b="1" spc="221" kern="0" dirty="0">
-                <a:solidFill>
-                  <a:srgbClr val="B45309"/>
-                </a:solidFill>
-                <a:latin typeface="Be Vietnam Pro" pitchFamily="34" charset="0"/>
-                <a:ea typeface="Be Vietnam Pro" pitchFamily="34" charset="-122"/>
-                <a:cs typeface="Be Vietnam Pro" pitchFamily="34" charset="-120"/>
-              </a:rPr>
-              <a:t> ·</a:t>
-            </a:r>
-            <a:r>
-              <a:rPr lang="en-US" sz="1950" b="1" spc="222" kern="0" dirty="0">
+              <a:t> VIEW,</a:t>
+            </a:r>
+            <a:r>
+              <a:rPr lang="en-US" sz="1950" b="1" spc="223" kern="0" dirty="0">
                 <a:solidFill>
                   <a:srgbClr val="B45309"/>
                 </a:solidFill>
@@ -13416,7 +13383,7 @@
               <a:buNone/>
             </a:pPr>
             <a:r>
-              <a:rPr lang="en-US" sz="1950" b="1" spc="198" kern="0" dirty="0">
+              <a:rPr lang="en-US" sz="1950" b="1" spc="223" kern="0" dirty="0">
                 <a:solidFill>
                   <a:srgbClr val="FF6A4D"/>
                 </a:solidFill>
@@ -13424,10 +13391,10 @@
                 <a:ea typeface="Be Vietnam Pro" pitchFamily="34" charset="-122"/>
                 <a:cs typeface="Be Vietnam Pro" pitchFamily="34" charset="-120"/>
               </a:rPr>
-              <a:t>CÂU</a:t>
-            </a:r>
-            <a:r>
-              <a:rPr lang="en-US" sz="1950" b="1" spc="227" kern="0" dirty="0">
+              <a:t>KIỂM</a:t>
+            </a:r>
+            <a:r>
+              <a:rPr lang="en-US" sz="1950" b="1" spc="224" kern="0" dirty="0">
                 <a:solidFill>
                   <a:srgbClr val="FF6A4D"/>
                 </a:solidFill>
@@ -13435,7 +13402,7 @@
                 <a:ea typeface="Be Vietnam Pro" pitchFamily="34" charset="-122"/>
                 <a:cs typeface="Be Vietnam Pro" pitchFamily="34" charset="-120"/>
               </a:rPr>
-              <a:t> HỎI</a:t>
+              <a:t> TRA</a:t>
             </a:r>
             <a:r>
               <a:rPr lang="en-US" sz="1950" b="1" spc="222" kern="0" dirty="0">
@@ -13446,7 +13413,7 @@
                 <a:ea typeface="Be Vietnam Pro" pitchFamily="34" charset="-122"/>
                 <a:cs typeface="Be Vietnam Pro" pitchFamily="34" charset="-120"/>
               </a:rPr>
-              <a:t> KIỂM</a:t>
+              <a:t> ·</a:t>
             </a:r>
             <a:r>
               <a:rPr lang="en-US" sz="1950" b="1" spc="225" kern="0" dirty="0">
@@ -13457,10 +13424,10 @@
                 <a:ea typeface="Be Vietnam Pro" pitchFamily="34" charset="-122"/>
                 <a:cs typeface="Be Vietnam Pro" pitchFamily="34" charset="-120"/>
               </a:rPr>
-              <a:t> TRA</a:t>
-            </a:r>
-            <a:r>
-              <a:rPr lang="en-US" sz="1950" b="1" spc="222" kern="0" dirty="0">
+              <a:t> TRANG</a:t>
+            </a:r>
+            <a:r>
+              <a:rPr lang="en-US" sz="1950" b="1" spc="208" kern="0" dirty="0">
                 <a:solidFill>
                   <a:srgbClr val="FF6A4D"/>
                 </a:solidFill>
@@ -13468,10 +13435,10 @@
                 <a:ea typeface="Be Vietnam Pro" pitchFamily="34" charset="-122"/>
                 <a:cs typeface="Be Vietnam Pro" pitchFamily="34" charset="-120"/>
               </a:rPr>
-              <a:t> ·</a:t>
-            </a:r>
-            <a:r>
-              <a:rPr lang="en-US" sz="1950" b="1" spc="225" kern="0" dirty="0">
+              <a:t> TỔNG</a:t>
+            </a:r>
+            <a:r>
+              <a:rPr lang="en-US" sz="1950" b="1" spc="214" kern="0" dirty="0">
                 <a:solidFill>
                   <a:srgbClr val="FF6A4D"/>
                 </a:solidFill>
@@ -13479,51 +13446,7 @@
                 <a:ea typeface="Be Vietnam Pro" pitchFamily="34" charset="-122"/>
                 <a:cs typeface="Be Vietnam Pro" pitchFamily="34" charset="-120"/>
               </a:rPr>
-              <a:t> TRANG</a:t>
-            </a:r>
-            <a:r>
-              <a:rPr lang="en-US" sz="1950" b="1" spc="208" kern="0" dirty="0">
-                <a:solidFill>
-                  <a:srgbClr val="FF6A4D"/>
-                </a:solidFill>
-                <a:latin typeface="Be Vietnam Pro" pitchFamily="34" charset="0"/>
-                <a:ea typeface="Be Vietnam Pro" pitchFamily="34" charset="-122"/>
-                <a:cs typeface="Be Vietnam Pro" pitchFamily="34" charset="-120"/>
-              </a:rPr>
-              <a:t> TỔNG</a:t>
-            </a:r>
-            <a:r>
-              <a:rPr lang="en-US" sz="1950" b="1" spc="214" kern="0" dirty="0">
-                <a:solidFill>
-                  <a:srgbClr val="FF6A4D"/>
-                </a:solidFill>
-                <a:latin typeface="Be Vietnam Pro" pitchFamily="34" charset="0"/>
-                <a:ea typeface="Be Vietnam Pro" pitchFamily="34" charset="-122"/>
-                <a:cs typeface="Be Vietnam Pro" pitchFamily="34" charset="-120"/>
-              </a:rPr>
-              <a:t> QUAN</a:t>
-            </a:r>
-            <a:r>
-              <a:rPr lang="en-US" sz="1950" b="1" spc="213" kern="0" dirty="0">
-                <a:solidFill>
-                  <a:srgbClr val="FF6A4D"/>
-                </a:solidFill>
-                <a:latin typeface="Be Vietnam Pro" pitchFamily="34" charset="0"/>
-                <a:ea typeface="Be Vietnam Pro" pitchFamily="34" charset="-122"/>
-                <a:cs typeface="Be Vietnam Pro" pitchFamily="34" charset="-120"/>
-              </a:rPr>
-              <a:t> CỦA</a:t>
-            </a:r>
-            <a:r>
-              <a:rPr lang="en-US" sz="1950" b="1" spc="215" kern="0" dirty="0">
-                <a:solidFill>
-                  <a:srgbClr val="FF6A4D"/>
-                </a:solidFill>
-                <a:latin typeface="Be Vietnam Pro" pitchFamily="34" charset="0"/>
-                <a:ea typeface="Be Vietnam Pro" pitchFamily="34" charset="-122"/>
-                <a:cs typeface="Be Vietnam Pro" pitchFamily="34" charset="-120"/>
-              </a:rPr>
-              <a:t> QUẢN</a:t>
+              <a:t> QUAN CỦA QUẢN</a:t>
             </a:r>
             <a:r>
               <a:rPr lang="en-US" sz="1950" b="1" spc="125" kern="0" dirty="0">
